--- a/Cafeteria/design-dashboard.pptx
+++ b/Cafeteria/design-dashboard.pptx
@@ -105,6 +105,11 @@
       </a:defRPr>
     </a:lvl9pPr>
   </p:defaultTextStyle>
+  <p:extLst>
+    <p:ext uri="{EFAFB233-063F-42B5-8137-9DF3F51BA10A}">
+      <p15:sldGuideLst xmlns:p15="http://schemas.microsoft.com/office/powerpoint/2012/main"/>
+    </p:ext>
+  </p:extLst>
 </p:presentation>
 </file>
 
@@ -239,7 +244,7 @@
           <a:p>
             <a:fld id="{CD660D5A-9BAF-443B-B363-3F53CF9711D4}" type="datetimeFigureOut">
               <a:rPr lang="pt-BR" smtClean="0"/>
-              <a:t>29/10/2025</a:t>
+              <a:t>12/11/2025</a:t>
             </a:fld>
             <a:endParaRPr lang="pt-BR"/>
           </a:p>
@@ -409,7 +414,7 @@
           <a:p>
             <a:fld id="{CD660D5A-9BAF-443B-B363-3F53CF9711D4}" type="datetimeFigureOut">
               <a:rPr lang="pt-BR" smtClean="0"/>
-              <a:t>29/10/2025</a:t>
+              <a:t>12/11/2025</a:t>
             </a:fld>
             <a:endParaRPr lang="pt-BR"/>
           </a:p>
@@ -589,7 +594,7 @@
           <a:p>
             <a:fld id="{CD660D5A-9BAF-443B-B363-3F53CF9711D4}" type="datetimeFigureOut">
               <a:rPr lang="pt-BR" smtClean="0"/>
-              <a:t>29/10/2025</a:t>
+              <a:t>12/11/2025</a:t>
             </a:fld>
             <a:endParaRPr lang="pt-BR"/>
           </a:p>
@@ -759,7 +764,7 @@
           <a:p>
             <a:fld id="{CD660D5A-9BAF-443B-B363-3F53CF9711D4}" type="datetimeFigureOut">
               <a:rPr lang="pt-BR" smtClean="0"/>
-              <a:t>29/10/2025</a:t>
+              <a:t>12/11/2025</a:t>
             </a:fld>
             <a:endParaRPr lang="pt-BR"/>
           </a:p>
@@ -1005,7 +1010,7 @@
           <a:p>
             <a:fld id="{CD660D5A-9BAF-443B-B363-3F53CF9711D4}" type="datetimeFigureOut">
               <a:rPr lang="pt-BR" smtClean="0"/>
-              <a:t>29/10/2025</a:t>
+              <a:t>12/11/2025</a:t>
             </a:fld>
             <a:endParaRPr lang="pt-BR"/>
           </a:p>
@@ -1237,7 +1242,7 @@
           <a:p>
             <a:fld id="{CD660D5A-9BAF-443B-B363-3F53CF9711D4}" type="datetimeFigureOut">
               <a:rPr lang="pt-BR" smtClean="0"/>
-              <a:t>29/10/2025</a:t>
+              <a:t>12/11/2025</a:t>
             </a:fld>
             <a:endParaRPr lang="pt-BR"/>
           </a:p>
@@ -1604,7 +1609,7 @@
           <a:p>
             <a:fld id="{CD660D5A-9BAF-443B-B363-3F53CF9711D4}" type="datetimeFigureOut">
               <a:rPr lang="pt-BR" smtClean="0"/>
-              <a:t>29/10/2025</a:t>
+              <a:t>12/11/2025</a:t>
             </a:fld>
             <a:endParaRPr lang="pt-BR"/>
           </a:p>
@@ -1722,7 +1727,7 @@
           <a:p>
             <a:fld id="{CD660D5A-9BAF-443B-B363-3F53CF9711D4}" type="datetimeFigureOut">
               <a:rPr lang="pt-BR" smtClean="0"/>
-              <a:t>29/10/2025</a:t>
+              <a:t>12/11/2025</a:t>
             </a:fld>
             <a:endParaRPr lang="pt-BR"/>
           </a:p>
@@ -1817,7 +1822,7 @@
           <a:p>
             <a:fld id="{CD660D5A-9BAF-443B-B363-3F53CF9711D4}" type="datetimeFigureOut">
               <a:rPr lang="pt-BR" smtClean="0"/>
-              <a:t>29/10/2025</a:t>
+              <a:t>12/11/2025</a:t>
             </a:fld>
             <a:endParaRPr lang="pt-BR"/>
           </a:p>
@@ -2094,7 +2099,7 @@
           <a:p>
             <a:fld id="{CD660D5A-9BAF-443B-B363-3F53CF9711D4}" type="datetimeFigureOut">
               <a:rPr lang="pt-BR" smtClean="0"/>
-              <a:t>29/10/2025</a:t>
+              <a:t>12/11/2025</a:t>
             </a:fld>
             <a:endParaRPr lang="pt-BR"/>
           </a:p>
@@ -2347,7 +2352,7 @@
           <a:p>
             <a:fld id="{CD660D5A-9BAF-443B-B363-3F53CF9711D4}" type="datetimeFigureOut">
               <a:rPr lang="pt-BR" smtClean="0"/>
-              <a:t>29/10/2025</a:t>
+              <a:t>12/11/2025</a:t>
             </a:fld>
             <a:endParaRPr lang="pt-BR"/>
           </a:p>
@@ -2560,7 +2565,7 @@
           <a:p>
             <a:fld id="{CD660D5A-9BAF-443B-B363-3F53CF9711D4}" type="datetimeFigureOut">
               <a:rPr lang="pt-BR" smtClean="0"/>
-              <a:t>29/10/2025</a:t>
+              <a:t>12/11/2025</a:t>
             </a:fld>
             <a:endParaRPr lang="pt-BR"/>
           </a:p>
@@ -3008,7 +3013,15 @@
           <a:bodyPr rtlCol="0" anchor="ctr"/>
           <a:lstStyle/>
           <a:p>
-            <a:pPr algn="ctr"/>
+            <a:r>
+              <a:rPr lang="pt-BR" sz="2000" dirty="0" smtClean="0">
+                <a:solidFill>
+                  <a:srgbClr val="DCD294"/>
+                </a:solidFill>
+                <a:latin typeface="Elephant" panose="02020904090505020303" pitchFamily="18" charset="0"/>
+              </a:rPr>
+              <a:t>            DASHBOARD </a:t>
+            </a:r>
             <a:r>
               <a:rPr lang="pt-BR" sz="2000" dirty="0">
                 <a:solidFill>
@@ -3016,7 +3029,7 @@
                 </a:solidFill>
                 <a:latin typeface="Elephant" panose="02020904090505020303" pitchFamily="18" charset="0"/>
               </a:rPr>
-              <a:t>DASHBOARD MAVEN ROASTERS</a:t>
+              <a:t>MAVEN ROASTERS</a:t>
             </a:r>
           </a:p>
         </p:txBody>
@@ -3086,7 +3099,7 @@
             </a:avLst>
           </a:prstGeom>
           <a:solidFill>
-            <a:srgbClr val="DCD294"/>
+            <a:srgbClr val="451C06"/>
           </a:solidFill>
           <a:ln>
             <a:noFill/>
@@ -3133,9 +3146,19 @@
               <a:gd name="adj" fmla="val 24609"/>
             </a:avLst>
           </a:prstGeom>
-          <a:solidFill>
-            <a:srgbClr val="F5EBE2"/>
-          </a:solidFill>
+          <a:gradFill>
+            <a:gsLst>
+              <a:gs pos="100000">
+                <a:srgbClr val="F5EBE2"/>
+              </a:gs>
+              <a:gs pos="50000">
+                <a:srgbClr val="DCD294"/>
+              </a:gs>
+            </a:gsLst>
+            <a:path path="circle">
+              <a:fillToRect l="100000" t="100000"/>
+            </a:path>
+          </a:gradFill>
           <a:ln>
             <a:noFill/>
           </a:ln>
@@ -3181,9 +3204,19 @@
               <a:gd name="adj" fmla="val 19717"/>
             </a:avLst>
           </a:prstGeom>
-          <a:solidFill>
-            <a:srgbClr val="F5EBE2"/>
-          </a:solidFill>
+          <a:gradFill>
+            <a:gsLst>
+              <a:gs pos="100000">
+                <a:srgbClr val="F5EBE2"/>
+              </a:gs>
+              <a:gs pos="50000">
+                <a:srgbClr val="DCD294"/>
+              </a:gs>
+            </a:gsLst>
+            <a:path path="circle">
+              <a:fillToRect l="100000" t="100000"/>
+            </a:path>
+          </a:gradFill>
           <a:ln>
             <a:noFill/>
           </a:ln>
@@ -3229,9 +3262,23 @@
               <a:gd name="adj" fmla="val 3462"/>
             </a:avLst>
           </a:prstGeom>
-          <a:solidFill>
-            <a:srgbClr val="F5EBE2"/>
-          </a:solidFill>
+          <a:gradFill flip="none" rotWithShape="1">
+            <a:gsLst>
+              <a:gs pos="0">
+                <a:srgbClr val="D8BAA8"/>
+              </a:gs>
+              <a:gs pos="100000">
+                <a:srgbClr val="F5EBE2">
+                  <a:shade val="100000"/>
+                  <a:satMod val="115000"/>
+                </a:srgbClr>
+              </a:gs>
+            </a:gsLst>
+            <a:path path="circle">
+              <a:fillToRect l="100000" t="100000"/>
+            </a:path>
+            <a:tileRect r="-100000" b="-100000"/>
+          </a:gradFill>
           <a:ln>
             <a:noFill/>
           </a:ln>
@@ -3286,9 +3333,23 @@
               <a:gd name="adj" fmla="val 2757"/>
             </a:avLst>
           </a:prstGeom>
-          <a:solidFill>
-            <a:srgbClr val="F5EBE2"/>
-          </a:solidFill>
+          <a:gradFill flip="none" rotWithShape="1">
+            <a:gsLst>
+              <a:gs pos="0">
+                <a:srgbClr val="D8BAA8"/>
+              </a:gs>
+              <a:gs pos="100000">
+                <a:srgbClr val="F5EBE2">
+                  <a:shade val="100000"/>
+                  <a:satMod val="115000"/>
+                </a:srgbClr>
+              </a:gs>
+            </a:gsLst>
+            <a:path path="circle">
+              <a:fillToRect l="100000" t="100000"/>
+            </a:path>
+            <a:tileRect r="-100000" b="-100000"/>
+          </a:gradFill>
           <a:ln>
             <a:noFill/>
           </a:ln>
@@ -3341,9 +3402,23 @@
               <a:gd name="adj" fmla="val 3932"/>
             </a:avLst>
           </a:prstGeom>
-          <a:solidFill>
-            <a:srgbClr val="F5EBE2"/>
-          </a:solidFill>
+          <a:gradFill flip="none" rotWithShape="1">
+            <a:gsLst>
+              <a:gs pos="0">
+                <a:srgbClr val="D8BAA8"/>
+              </a:gs>
+              <a:gs pos="100000">
+                <a:srgbClr val="F5EBE2">
+                  <a:shade val="100000"/>
+                  <a:satMod val="115000"/>
+                </a:srgbClr>
+              </a:gs>
+            </a:gsLst>
+            <a:path path="circle">
+              <a:fillToRect l="100000" t="100000"/>
+            </a:path>
+            <a:tileRect r="-100000" b="-100000"/>
+          </a:gradFill>
           <a:ln>
             <a:noFill/>
           </a:ln>
@@ -3377,10 +3452,9 @@
           <a:p>
             <a:pPr algn="ctr"/>
             <a:r>
-              <a:rPr lang="pt-BR" dirty="0" smtClean="0"/>
+              <a:rPr lang="pt-BR" dirty="0"/>
               <a:t>     </a:t>
             </a:r>
-            <a:endParaRPr lang="pt-BR" dirty="0"/>
           </a:p>
         </p:txBody>
       </p:sp>
@@ -3400,9 +3474,23 @@
               <a:gd name="adj" fmla="val 2647"/>
             </a:avLst>
           </a:prstGeom>
-          <a:solidFill>
-            <a:srgbClr val="F5EBE2"/>
-          </a:solidFill>
+          <a:gradFill flip="none" rotWithShape="1">
+            <a:gsLst>
+              <a:gs pos="0">
+                <a:srgbClr val="D8BAA8"/>
+              </a:gs>
+              <a:gs pos="100000">
+                <a:srgbClr val="F5EBE2">
+                  <a:shade val="100000"/>
+                  <a:satMod val="115000"/>
+                </a:srgbClr>
+              </a:gs>
+            </a:gsLst>
+            <a:path path="circle">
+              <a:fillToRect l="100000" t="100000"/>
+            </a:path>
+            <a:tileRect r="-100000" b="-100000"/>
+          </a:gradFill>
           <a:ln>
             <a:noFill/>
           </a:ln>
@@ -3464,7 +3552,7 @@
             <a:r>
               <a:rPr lang="pt-BR" sz="1600" dirty="0" smtClean="0">
                 <a:solidFill>
-                  <a:srgbClr val="451C06"/>
+                  <a:schemeClr val="bg1"/>
                 </a:solidFill>
                 <a:latin typeface="Bahnschrift" panose="020B0502040204020203" pitchFamily="34" charset="0"/>
               </a:rPr>
@@ -3472,7 +3560,7 @@
             </a:r>
             <a:endParaRPr lang="pt-BR" sz="1600" dirty="0">
               <a:solidFill>
-                <a:srgbClr val="451C06"/>
+                <a:schemeClr val="bg1"/>
               </a:solidFill>
               <a:latin typeface="Bahnschrift" panose="020B0502040204020203" pitchFamily="34" charset="0"/>
             </a:endParaRPr>
@@ -3548,7 +3636,7 @@
                 </a:solidFill>
                 <a:latin typeface="Bahnschrift" panose="020B0502040204020203" pitchFamily="34" charset="0"/>
               </a:rPr>
-              <a:t>Ticket Médio</a:t>
+              <a:t> Ticket Médio</a:t>
             </a:r>
             <a:endParaRPr lang="pt-BR" sz="1600" dirty="0">
               <a:solidFill>
@@ -3607,8 +3695,8 @@
         </p:nvSpPr>
         <p:spPr>
           <a:xfrm>
-            <a:off x="8490064" y="895154"/>
-            <a:ext cx="2850341" cy="307777"/>
+            <a:off x="8391366" y="907122"/>
+            <a:ext cx="3524134" cy="307777"/>
           </a:xfrm>
           <a:prstGeom prst="rect">
             <a:avLst/>
@@ -3628,7 +3716,7 @@
                 </a:solidFill>
                 <a:latin typeface="Bahnschrift" panose="020B0502040204020203" pitchFamily="34" charset="0"/>
               </a:rPr>
-              <a:t>Categoria mais vendida</a:t>
+              <a:t>Categoria mais vendida – Café Campeão</a:t>
             </a:r>
             <a:endParaRPr lang="pt-BR" sz="1400" dirty="0">
               <a:solidFill>
@@ -3648,7 +3736,7 @@
         <p:spPr>
           <a:xfrm>
             <a:off x="2305786" y="4032354"/>
-            <a:ext cx="2850341" cy="307777"/>
+            <a:ext cx="5344265" cy="307777"/>
           </a:xfrm>
           <a:prstGeom prst="rect">
             <a:avLst/>
@@ -3668,7 +3756,7 @@
                 </a:solidFill>
                 <a:latin typeface="Bahnschrift" panose="020B0502040204020203" pitchFamily="34" charset="0"/>
               </a:rPr>
-              <a:t>Receita por Mês</a:t>
+              <a:t>Receita por Mês – Crescimento Constante no 1° Semestre</a:t>
             </a:r>
             <a:endParaRPr lang="pt-BR" sz="1400" dirty="0">
               <a:solidFill>
@@ -3687,7 +3775,7 @@
         </p:nvSpPr>
         <p:spPr>
           <a:xfrm>
-            <a:off x="8490064" y="4032354"/>
+            <a:off x="8390466" y="4019426"/>
             <a:ext cx="3079404" cy="307777"/>
           </a:xfrm>
           <a:prstGeom prst="rect">
@@ -3721,7 +3809,7 @@
       </p:sp>
       <p:pic>
         <p:nvPicPr>
-          <p:cNvPr id="23" name="Imagem 22"/>
+          <p:cNvPr id="24" name="Imagem 23"/>
           <p:cNvPicPr>
             <a:picLocks noChangeAspect="1"/>
           </p:cNvPicPr>
@@ -3741,8 +3829,8 @@
         </p:blipFill>
         <p:spPr>
           <a:xfrm>
-            <a:off x="2155949" y="789518"/>
-            <a:ext cx="481079" cy="481079"/>
+            <a:off x="2156125" y="1775880"/>
+            <a:ext cx="558801" cy="558801"/>
           </a:xfrm>
           <a:prstGeom prst="rect">
             <a:avLst/>
@@ -3751,7 +3839,7 @@
       </p:pic>
       <p:pic>
         <p:nvPicPr>
-          <p:cNvPr id="24" name="Imagem 23"/>
+          <p:cNvPr id="25" name="Imagem 24"/>
           <p:cNvPicPr>
             <a:picLocks noChangeAspect="1"/>
           </p:cNvPicPr>
@@ -3771,17 +3859,51 @@
         </p:blipFill>
         <p:spPr>
           <a:xfrm>
-            <a:off x="2156125" y="1775880"/>
-            <a:ext cx="558801" cy="558801"/>
+            <a:off x="2173983" y="2770711"/>
+            <a:ext cx="540943" cy="540943"/>
           </a:xfrm>
           <a:prstGeom prst="rect">
             <a:avLst/>
           </a:prstGeom>
         </p:spPr>
       </p:pic>
+      <p:sp>
+        <p:nvSpPr>
+          <p:cNvPr id="26" name="CaixaDeTexto 25"/>
+          <p:cNvSpPr txBox="1"/>
+          <p:nvPr/>
+        </p:nvSpPr>
+        <p:spPr>
+          <a:xfrm>
+            <a:off x="454986" y="69992"/>
+            <a:ext cx="1300238" cy="461665"/>
+          </a:xfrm>
+          <a:prstGeom prst="rect">
+            <a:avLst/>
+          </a:prstGeom>
+          <a:noFill/>
+        </p:spPr>
+        <p:txBody>
+          <a:bodyPr wrap="square" rtlCol="0">
+            <a:spAutoFit/>
+          </a:bodyPr>
+          <a:lstStyle/>
+          <a:p>
+            <a:r>
+              <a:rPr lang="pt-BR" sz="2400" dirty="0" err="1" smtClean="0">
+                <a:latin typeface="Broadway" panose="04040905080B02020502" pitchFamily="82" charset="0"/>
+              </a:rPr>
+              <a:t>Maven</a:t>
+            </a:r>
+            <a:endParaRPr lang="pt-BR" sz="2400" dirty="0">
+              <a:latin typeface="Broadway" panose="04040905080B02020502" pitchFamily="82" charset="0"/>
+            </a:endParaRPr>
+          </a:p>
+        </p:txBody>
+      </p:sp>
       <p:pic>
         <p:nvPicPr>
-          <p:cNvPr id="25" name="Imagem 24"/>
+          <p:cNvPr id="27" name="Imagem 26"/>
           <p:cNvPicPr>
             <a:picLocks noChangeAspect="1"/>
           </p:cNvPicPr>
@@ -3801,8 +3923,8 @@
         </p:blipFill>
         <p:spPr>
           <a:xfrm>
-            <a:off x="2173983" y="2770711"/>
-            <a:ext cx="540943" cy="540943"/>
+            <a:off x="92285" y="139746"/>
+            <a:ext cx="444597" cy="444597"/>
           </a:xfrm>
           <a:prstGeom prst="rect">
             <a:avLst/>
@@ -3811,33 +3933,32 @@
       </p:pic>
       <p:sp>
         <p:nvSpPr>
-          <p:cNvPr id="26" name="CaixaDeTexto 25"/>
-          <p:cNvSpPr txBox="1"/>
+          <p:cNvPr id="28" name="Retângulo 27"/>
+          <p:cNvSpPr/>
           <p:nvPr/>
         </p:nvSpPr>
         <p:spPr>
           <a:xfrm>
-            <a:off x="570897" y="69992"/>
-            <a:ext cx="1300238" cy="461665"/>
+            <a:off x="459247" y="336548"/>
+            <a:ext cx="1235531" cy="369332"/>
           </a:xfrm>
           <a:prstGeom prst="rect">
             <a:avLst/>
           </a:prstGeom>
-          <a:noFill/>
-        </p:spPr>
-        <p:txBody>
-          <a:bodyPr wrap="square" rtlCol="0">
+        </p:spPr>
+        <p:txBody>
+          <a:bodyPr wrap="none">
             <a:spAutoFit/>
           </a:bodyPr>
           <a:lstStyle/>
           <a:p>
             <a:r>
-              <a:rPr lang="pt-BR" sz="2400" dirty="0" err="1" smtClean="0">
+              <a:rPr lang="pt-BR" dirty="0" err="1" smtClean="0">
                 <a:latin typeface="Broadway" panose="04040905080B02020502" pitchFamily="82" charset="0"/>
               </a:rPr>
-              <a:t>Maven</a:t>
-            </a:r>
-            <a:endParaRPr lang="pt-BR" sz="2400" dirty="0">
+              <a:t>Roasters</a:t>
+            </a:r>
+            <a:endParaRPr lang="pt-BR" dirty="0">
               <a:latin typeface="Broadway" panose="04040905080B02020502" pitchFamily="82" charset="0"/>
             </a:endParaRPr>
           </a:p>
@@ -3845,7 +3966,7 @@
       </p:sp>
       <p:pic>
         <p:nvPicPr>
-          <p:cNvPr id="27" name="Imagem 26"/>
+          <p:cNvPr id="3" name="Imagem 2"/>
           <p:cNvPicPr>
             <a:picLocks noChangeAspect="1"/>
           </p:cNvPicPr>
@@ -3853,6 +3974,7 @@
         </p:nvPicPr>
         <p:blipFill>
           <a:blip r:embed="rId5" cstate="print">
+            <a:lum bright="70000" contrast="-70000"/>
             <a:extLst>
               <a:ext uri="{28A0092B-C50C-407E-A947-70E740481C1C}">
                 <a14:useLocalDpi xmlns:a14="http://schemas.microsoft.com/office/drawing/2010/main" val="0"/>
@@ -3865,74 +3987,32 @@
         </p:blipFill>
         <p:spPr>
           <a:xfrm>
-            <a:off x="208196" y="139746"/>
-            <a:ext cx="444597" cy="444597"/>
+            <a:off x="2121376" y="754498"/>
+            <a:ext cx="554092" cy="554092"/>
           </a:xfrm>
           <a:prstGeom prst="rect">
             <a:avLst/>
           </a:prstGeom>
         </p:spPr>
       </p:pic>
-      <p:sp>
-        <p:nvSpPr>
-          <p:cNvPr id="28" name="Retângulo 27"/>
-          <p:cNvSpPr/>
-          <p:nvPr/>
-        </p:nvSpPr>
-        <p:spPr>
-          <a:xfrm>
-            <a:off x="575158" y="336548"/>
-            <a:ext cx="1235531" cy="369332"/>
-          </a:xfrm>
-          <a:prstGeom prst="rect">
-            <a:avLst/>
-          </a:prstGeom>
-        </p:spPr>
-        <p:txBody>
-          <a:bodyPr wrap="none">
-            <a:spAutoFit/>
-          </a:bodyPr>
-          <a:lstStyle/>
-          <a:p>
-            <a:r>
-              <a:rPr lang="pt-BR" dirty="0" err="1" smtClean="0">
-                <a:latin typeface="Broadway" panose="04040905080B02020502" pitchFamily="82" charset="0"/>
-              </a:rPr>
-              <a:t>Roasters</a:t>
-            </a:r>
-            <a:endParaRPr lang="pt-BR" dirty="0">
-              <a:latin typeface="Broadway" panose="04040905080B02020502" pitchFamily="82" charset="0"/>
-            </a:endParaRPr>
-          </a:p>
-        </p:txBody>
-      </p:sp>
       <p:pic>
         <p:nvPicPr>
-          <p:cNvPr id="29" name="Imagem 28"/>
+          <p:cNvPr id="2" name="Imagem 1"/>
           <p:cNvPicPr>
             <a:picLocks noChangeAspect="1"/>
           </p:cNvPicPr>
           <p:nvPr/>
         </p:nvPicPr>
         <p:blipFill>
-          <a:blip r:embed="rId6">
+          <a:blip r:embed="rId6" cstate="print">
             <a:duotone>
-              <a:schemeClr val="bg2">
+              <a:schemeClr val="accent2">
                 <a:shade val="45000"/>
                 <a:satMod val="135000"/>
               </a:schemeClr>
               <a:prstClr val="white"/>
             </a:duotone>
             <a:extLst>
-              <a:ext uri="{BEBA8EAE-BF5A-486C-A8C5-ECC9F3942E4B}">
-                <a14:imgProps xmlns:a14="http://schemas.microsoft.com/office/drawing/2010/main">
-                  <a14:imgLayer r:embed="rId7">
-                    <a14:imgEffect>
-                      <a14:artisticPhotocopy/>
-                    </a14:imgEffect>
-                  </a14:imgLayer>
-                </a14:imgProps>
-              </a:ext>
               <a:ext uri="{28A0092B-C50C-407E-A947-70E740481C1C}">
                 <a14:useLocalDpi xmlns:a14="http://schemas.microsoft.com/office/drawing/2010/main" val="0"/>
               </a:ext>
@@ -3944,146 +4024,8 @@
         </p:blipFill>
         <p:spPr>
           <a:xfrm>
-            <a:off x="5964920" y="1693306"/>
-            <a:ext cx="2133294" cy="2133294"/>
-          </a:xfrm>
-          <a:prstGeom prst="rect">
-            <a:avLst/>
-          </a:prstGeom>
-        </p:spPr>
-      </p:pic>
-      <p:pic>
-        <p:nvPicPr>
-          <p:cNvPr id="30" name="Imagem 29"/>
-          <p:cNvPicPr>
-            <a:picLocks noChangeAspect="1"/>
-          </p:cNvPicPr>
-          <p:nvPr/>
-        </p:nvPicPr>
-        <p:blipFill>
-          <a:blip r:embed="rId6">
-            <a:duotone>
-              <a:schemeClr val="bg2">
-                <a:shade val="45000"/>
-                <a:satMod val="135000"/>
-              </a:schemeClr>
-              <a:prstClr val="white"/>
-            </a:duotone>
-            <a:extLst>
-              <a:ext uri="{BEBA8EAE-BF5A-486C-A8C5-ECC9F3942E4B}">
-                <a14:imgProps xmlns:a14="http://schemas.microsoft.com/office/drawing/2010/main">
-                  <a14:imgLayer r:embed="rId7">
-                    <a14:imgEffect>
-                      <a14:artisticPhotocopy/>
-                    </a14:imgEffect>
-                  </a14:imgLayer>
-                </a14:imgProps>
-              </a:ext>
-              <a:ext uri="{28A0092B-C50C-407E-A947-70E740481C1C}">
-                <a14:useLocalDpi xmlns:a14="http://schemas.microsoft.com/office/drawing/2010/main" val="0"/>
-              </a:ext>
-            </a:extLst>
-          </a:blip>
-          <a:stretch>
-            <a:fillRect/>
-          </a:stretch>
-        </p:blipFill>
-        <p:spPr>
-          <a:xfrm>
-            <a:off x="9711570" y="1693306"/>
-            <a:ext cx="2133294" cy="2133294"/>
-          </a:xfrm>
-          <a:prstGeom prst="rect">
-            <a:avLst/>
-          </a:prstGeom>
-        </p:spPr>
-      </p:pic>
-      <p:pic>
-        <p:nvPicPr>
-          <p:cNvPr id="31" name="Imagem 30"/>
-          <p:cNvPicPr>
-            <a:picLocks noChangeAspect="1"/>
-          </p:cNvPicPr>
-          <p:nvPr/>
-        </p:nvPicPr>
-        <p:blipFill>
-          <a:blip r:embed="rId6">
-            <a:duotone>
-              <a:schemeClr val="bg2">
-                <a:shade val="45000"/>
-                <a:satMod val="135000"/>
-              </a:schemeClr>
-              <a:prstClr val="white"/>
-            </a:duotone>
-            <a:extLst>
-              <a:ext uri="{BEBA8EAE-BF5A-486C-A8C5-ECC9F3942E4B}">
-                <a14:imgProps xmlns:a14="http://schemas.microsoft.com/office/drawing/2010/main">
-                  <a14:imgLayer r:embed="rId7">
-                    <a14:imgEffect>
-                      <a14:artisticPhotocopy/>
-                    </a14:imgEffect>
-                  </a14:imgLayer>
-                </a14:imgProps>
-              </a:ext>
-              <a:ext uri="{28A0092B-C50C-407E-A947-70E740481C1C}">
-                <a14:useLocalDpi xmlns:a14="http://schemas.microsoft.com/office/drawing/2010/main" val="0"/>
-              </a:ext>
-            </a:extLst>
-          </a:blip>
-          <a:stretch>
-            <a:fillRect/>
-          </a:stretch>
-        </p:blipFill>
-        <p:spPr>
-          <a:xfrm>
-            <a:off x="5960839" y="4718281"/>
-            <a:ext cx="2133294" cy="2133294"/>
-          </a:xfrm>
-          <a:prstGeom prst="rect">
-            <a:avLst/>
-          </a:prstGeom>
-        </p:spPr>
-      </p:pic>
-      <p:pic>
-        <p:nvPicPr>
-          <p:cNvPr id="32" name="Imagem 31"/>
-          <p:cNvPicPr>
-            <a:picLocks noChangeAspect="1"/>
-          </p:cNvPicPr>
-          <p:nvPr/>
-        </p:nvPicPr>
-        <p:blipFill>
-          <a:blip r:embed="rId6">
-            <a:duotone>
-              <a:schemeClr val="bg2">
-                <a:shade val="45000"/>
-                <a:satMod val="135000"/>
-              </a:schemeClr>
-              <a:prstClr val="white"/>
-            </a:duotone>
-            <a:extLst>
-              <a:ext uri="{BEBA8EAE-BF5A-486C-A8C5-ECC9F3942E4B}">
-                <a14:imgProps xmlns:a14="http://schemas.microsoft.com/office/drawing/2010/main">
-                  <a14:imgLayer r:embed="rId7">
-                    <a14:imgEffect>
-                      <a14:artisticPhotocopy/>
-                    </a14:imgEffect>
-                  </a14:imgLayer>
-                </a14:imgProps>
-              </a:ext>
-              <a:ext uri="{28A0092B-C50C-407E-A947-70E740481C1C}">
-                <a14:useLocalDpi xmlns:a14="http://schemas.microsoft.com/office/drawing/2010/main" val="0"/>
-              </a:ext>
-            </a:extLst>
-          </a:blip>
-          <a:stretch>
-            <a:fillRect/>
-          </a:stretch>
-        </p:blipFill>
-        <p:spPr>
-          <a:xfrm>
-            <a:off x="9711570" y="4696516"/>
-            <a:ext cx="2133294" cy="2133294"/>
+            <a:off x="7393192" y="1484188"/>
+            <a:ext cx="508011" cy="508011"/>
           </a:xfrm>
           <a:prstGeom prst="rect">
             <a:avLst/>
